--- a/examples/pm10_memo_temp/memo_temp_guide.pptx
+++ b/examples/pm10_memo_temp/memo_temp_guide.pptx
@@ -587,9 +587,7 @@
               <a:t>NOTE_CONTENT_FORMAT: 1.0</a:t>
             </a:r>
           </a:p>
-          <a:p>
-            <a:endParaRPr/>
-          </a:p>
+          <a:p/>
           <a:p>
             <a:r>
               <a:t>===BLOCK===</a:t>
@@ -600,9 +598,7 @@
               <a:t>{{BLOCK:IMAGE}}</a:t>
             </a:r>
           </a:p>
-          <a:p>
-            <a:endParaRPr/>
-          </a:p>
+          <a:p/>
           <a:p>
             <a:r>
               <a:t>export-image-mode: slide_with_rectpct</a:t>
@@ -618,45 +614,34 @@
               <a:t>export-image: extracted/figures/&lt;__BASEFILENAME__&gt;_slide&lt;__SLIDENUM__&gt;_fig.png</a:t>
             </a:r>
           </a:p>
-          <a:p>
-            <a:endParaRPr/>
-          </a:p>
-          <a:p>
-            <a:r>
-              <a:rPr lang="en-US"/>
+          <a:p/>
+          <a:p>
+            <a:r>
               <a:t>===BLOCK===</a:t>
             </a:r>
           </a:p>
           <a:p>
             <a:r>
-              <a:rPr lang="en-US"/>
               <a:t>{{BLOCK:IMAGE}}</a:t>
             </a:r>
           </a:p>
-          <a:p>
-            <a:endParaRPr lang="en-US"/>
-          </a:p>
-          <a:p>
-            <a:r>
-              <a:rPr lang="en-US"/>
+          <a:p/>
+          <a:p>
+            <a:r>
               <a:t>export-image-mode: slide_with_rectpct</a:t>
             </a:r>
           </a:p>
           <a:p>
             <a:r>
-              <a:rPr lang="en-US"/>
               <a:t>export-image-target: keyvisual</a:t>
             </a:r>
           </a:p>
           <a:p>
             <a:r>
-              <a:rPr lang="en-US"/>
               <a:t>export-image: extracted/figures/&lt;__BASEFILENAME__&gt;_keyvisual.png</a:t>
             </a:r>
           </a:p>
-          <a:p>
-            <a:endParaRPr lang="en-US"/>
-          </a:p>
+          <a:p/>
           <a:p>
             <a:r>
               <a:t>===BLOCK===</a:t>
@@ -667,9 +652,7 @@
               <a:t>{{BLOCK:MD:LONG}}</a:t>
             </a:r>
           </a:p>
-          <a:p>
-            <a:endParaRPr/>
-          </a:p>
+          <a:p/>
           <a:p>
             <a:r>
               <a:t>export-note: extracted/&lt;__BASEFILENAME__&gt;_slide&lt;__SLIDENUM__&gt;_md.md</a:t>
@@ -685,114 +668,72 @@
               <a:t>## &lt;__TITLE__&gt;</a:t>
             </a:r>
           </a:p>
-          <a:p>
-            <a:endParaRPr/>
-          </a:p>
+          <a:p/>
           <a:p>
             <a:r>
               <a:t>長い研修テキストの制作中には、 「とりあえずたたき台を書いておくけど、必ず直前に最終確認しろ！」 というような事項がどうしても出てくるものです。 紙の資料なら付箋紙を貼るところですがデジタル文書ではそれができない。 そこでパワポ資料では付箋紙代わりに目立つ図形にそうした注意書きを書いて残しておいたりしますが、これは本番資料からは必ず削除しなければならないもの。</a:t>
             </a:r>
           </a:p>
-          <a:p>
-            <a:endParaRPr/>
-          </a:p>
+          <a:p/>
           <a:p>
             <a:r>
               <a:t>ところが・・・そう、残ってしまうことがあるんですね。</a:t>
             </a:r>
           </a:p>
-          <a:p>
-            <a:endParaRPr/>
-          </a:p>
+          <a:p/>
           <a:p>
             <a:r>
               <a:t>そこで、MEMO/TEMPマーカーです。 #MEMO# または #TEMP# という文字列を含むシェイプは deletecsp に関係なく必ず削除されます。</a:t>
             </a:r>
           </a:p>
-          <a:p>
-            <a:endParaRPr/>
-          </a:p>
+          <a:p/>
           <a:p>
             <a:r>
               <a:t>MEMO、TEMP の動作は同じです。</a:t>
             </a:r>
           </a:p>
-          <a:p>
-            <a:endParaRPr/>
-          </a:p>
+          <a:p/>
           <a:p>
             <a:r>
               <a:t>結合指示書への記入は不要です。</a:t>
             </a:r>
           </a:p>
-          <a:p>
-            <a:endParaRPr/>
-          </a:p>
-          <a:p>
-            <a:endParaRPr/>
-          </a:p>
-          <a:p>
-            <a:r>
-              <a:t>```{=latex}</a:t>
-            </a:r>
-          </a:p>
-          <a:p>
-            <a:r>
-              <a:t>\par\vspace{1\baselineskip}</a:t>
-            </a:r>
-          </a:p>
-          <a:p>
-            <a:r>
-              <a:t>\begin{center}</a:t>
-            </a:r>
-          </a:p>
-          <a:p>
-            <a:r>
-              <a:t>```</a:t>
-            </a:r>
-          </a:p>
-          <a:p>
-            <a:endParaRPr/>
-          </a:p>
+          <a:p/>
+          <a:p/>
+          <a:p>
+            <a:r>
+              <a:t>{{vspace:1}}</a:t>
+            </a:r>
+          </a:p>
+          <a:p/>
+          <a:p>
+            <a:r>
+              <a:t>::: {.center}</a:t>
+            </a:r>
+          </a:p>
+          <a:p/>
           <a:p>
             <a:r>
               <a:t>![](figures/&lt;__BASEFILENAME__&gt;_slide&lt;__SLIDENUM__&gt;_fig.png){ width=95% }</a:t>
             </a:r>
-            <a:endParaRPr lang="en-US"/>
-          </a:p>
-          <a:p>
-            <a:endParaRPr lang="en-US"/>
-          </a:p>
-          <a:p>
-            <a:r>
-              <a:rPr lang="en-US"/>
+          </a:p>
+          <a:p/>
+          <a:p>
+            <a:r>
               <a:t>![](figures/&lt;__BASEFILENAME__&gt;_keyvisual.png){ width=90% }</a:t>
             </a:r>
           </a:p>
-          <a:p>
-            <a:endParaRPr/>
-          </a:p>
-          <a:p>
-            <a:endParaRPr/>
-          </a:p>
-          <a:p>
-            <a:r>
-              <a:t>```{=latex}</a:t>
-            </a:r>
-          </a:p>
-          <a:p>
-            <a:r>
-              <a:t>\end{center}</a:t>
-            </a:r>
-          </a:p>
-          <a:p>
-            <a:r>
-              <a:t>\par\vspace{1\baselineskip}</a:t>
-            </a:r>
-          </a:p>
-          <a:p>
-            <a:r>
-              <a:t>```</a:t>
+          <a:p/>
+          <a:p/>
+          <a:p>
+            <a:r>
+              <a:t>:::</a:t>
+            </a:r>
+          </a:p>
+          <a:p/>
+          <a:p>
+            <a:r>
+              <a:t>{{vspace:1}}</a:t>
             </a:r>
           </a:p>
         </p:txBody>
@@ -881,9 +822,7 @@
               <a:t>NOTE_CONTENT_FORMAT: 1.0</a:t>
             </a:r>
           </a:p>
-          <a:p>
-            <a:endParaRPr/>
-          </a:p>
+          <a:p/>
           <a:p>
             <a:r>
               <a:t>===BLOCK===</a:t>
@@ -894,9 +833,7 @@
               <a:t>{{BLOCK:IMAGE}}</a:t>
             </a:r>
           </a:p>
-          <a:p>
-            <a:endParaRPr/>
-          </a:p>
+          <a:p/>
           <a:p>
             <a:r>
               <a:t>export-image-mode: slide_with_rectpct</a:t>
@@ -912,9 +849,7 @@
               <a:t>export-image: extracted/figures/&lt;__BASEFILENAME__&gt;_slide&lt;__SLIDENUM__&gt;_fig.png</a:t>
             </a:r>
           </a:p>
-          <a:p>
-            <a:endParaRPr/>
-          </a:p>
+          <a:p/>
           <a:p>
             <a:r>
               <a:t>===BLOCK===</a:t>
@@ -925,9 +860,7 @@
               <a:t>{{BLOCK:MD:LONG}}</a:t>
             </a:r>
           </a:p>
-          <a:p>
-            <a:endParaRPr/>
-          </a:p>
+          <a:p/>
           <a:p>
             <a:r>
               <a:t>export-note: extracted/&lt;__BASEFILENAME__&gt;_slide&lt;__SLIDENUM__&gt;_md.md</a:t>
@@ -943,9 +876,7 @@
               <a:t>## &lt;__TITLE__&gt;</a:t>
             </a:r>
           </a:p>
-          <a:p>
-            <a:endParaRPr/>
-          </a:p>
+          <a:p/>
           <a:p>
             <a:r>
               <a:t>下記の 「シェイプ」は無条件で消去されます。画像は残ります。</a:t>
@@ -956,58 +887,34 @@
               <a:t>（PDFファイル中では両方とも残って見えますが、マージされた .pptx からは削除されます）</a:t>
             </a:r>
           </a:p>
-          <a:p>
-            <a:endParaRPr/>
-          </a:p>
-          <a:p>
-            <a:r>
-              <a:t>```{=latex}</a:t>
-            </a:r>
-          </a:p>
-          <a:p>
-            <a:r>
-              <a:t>\par\vspace{1\baselineskip}</a:t>
-            </a:r>
-          </a:p>
-          <a:p>
-            <a:r>
-              <a:t>\begin{center}</a:t>
-            </a:r>
-          </a:p>
-          <a:p>
-            <a:r>
-              <a:t>```</a:t>
-            </a:r>
-          </a:p>
-          <a:p>
-            <a:endParaRPr/>
-          </a:p>
+          <a:p/>
+          <a:p>
+            <a:r>
+              <a:t>{{vspace:1}}</a:t>
+            </a:r>
+          </a:p>
+          <a:p/>
+          <a:p>
+            <a:r>
+              <a:t>::: {.center}</a:t>
+            </a:r>
+          </a:p>
+          <a:p/>
           <a:p>
             <a:r>
               <a:t>![](figures/&lt;__BASEFILENAME__&gt;_slide&lt;__SLIDENUM__&gt;_fig.png){ width=95% }</a:t>
             </a:r>
           </a:p>
-          <a:p>
-            <a:endParaRPr/>
-          </a:p>
-          <a:p>
-            <a:r>
-              <a:t>```{=latex}</a:t>
-            </a:r>
-          </a:p>
-          <a:p>
-            <a:r>
-              <a:t>\end{center}</a:t>
-            </a:r>
-          </a:p>
-          <a:p>
-            <a:r>
-              <a:t>\par\vspace{1\baselineskip}</a:t>
-            </a:r>
-          </a:p>
-          <a:p>
-            <a:r>
-              <a:t>```</a:t>
+          <a:p/>
+          <a:p>
+            <a:r>
+              <a:t>:::</a:t>
+            </a:r>
+          </a:p>
+          <a:p/>
+          <a:p>
+            <a:r>
+              <a:t>{{vspace:1}}</a:t>
             </a:r>
           </a:p>
         </p:txBody>
@@ -1114,9 +1021,7 @@
               <a:t>NOTE_CONTENT_FORMAT: 1.0</a:t>
             </a:r>
           </a:p>
-          <a:p>
-            <a:endParaRPr/>
-          </a:p>
+          <a:p/>
           <a:p>
             <a:r>
               <a:t>===BLOCK===</a:t>
@@ -1127,9 +1032,7 @@
               <a:t>{{BLOCK:IMAGE}}</a:t>
             </a:r>
           </a:p>
-          <a:p>
-            <a:endParaRPr/>
-          </a:p>
+          <a:p/>
           <a:p>
             <a:r>
               <a:t>export-image-mode: slide_with_rectpct</a:t>
@@ -1145,9 +1048,7 @@
               <a:t>export-image: extracted/figures/&lt;__BASEFILENAME__&gt;_slide&lt;__SLIDENUM__&gt;_fig.png</a:t>
             </a:r>
           </a:p>
-          <a:p>
-            <a:endParaRPr/>
-          </a:p>
+          <a:p/>
           <a:p>
             <a:r>
               <a:t>===BLOCK===</a:t>
@@ -1158,9 +1059,7 @@
               <a:t>{{BLOCK:MD:LONG}}</a:t>
             </a:r>
           </a:p>
-          <a:p>
-            <a:endParaRPr/>
-          </a:p>
+          <a:p/>
           <a:p>
             <a:r>
               <a:t>export-note: extracted/&lt;__BASEFILENAME__&gt;_slide&lt;__SLIDENUM__&gt;_md.md</a:t>
@@ -1176,9 +1075,7 @@
               <a:t>## &lt;__TITLE__&gt;</a:t>
             </a:r>
           </a:p>
-          <a:p>
-            <a:endParaRPr/>
-          </a:p>
+          <a:p/>
           <a:p>
             <a:r>
               <a:t>テーブルセルに MEMO, TEMPマーカーがある場合は、テーブルごと消去されます。</a:t>
@@ -1189,58 +1086,34 @@
               <a:t>（PDFファイル中では両方とも残って見えますが、マージされた .pptx からは削除されます）</a:t>
             </a:r>
           </a:p>
-          <a:p>
-            <a:endParaRPr/>
-          </a:p>
-          <a:p>
-            <a:r>
-              <a:t>```{=latex}</a:t>
-            </a:r>
-          </a:p>
-          <a:p>
-            <a:r>
-              <a:t>\par\vspace{1\baselineskip}</a:t>
-            </a:r>
-          </a:p>
-          <a:p>
-            <a:r>
-              <a:t>\begin{center}</a:t>
-            </a:r>
-          </a:p>
-          <a:p>
-            <a:r>
-              <a:t>```</a:t>
-            </a:r>
-          </a:p>
-          <a:p>
-            <a:endParaRPr/>
-          </a:p>
+          <a:p/>
+          <a:p>
+            <a:r>
+              <a:t>{{vspace:1}}</a:t>
+            </a:r>
+          </a:p>
+          <a:p/>
+          <a:p>
+            <a:r>
+              <a:t>::: {.center}</a:t>
+            </a:r>
+          </a:p>
+          <a:p/>
           <a:p>
             <a:r>
               <a:t>![](figures/&lt;__BASEFILENAME__&gt;_slide&lt;__SLIDENUM__&gt;_fig.png){ width=95% }</a:t>
             </a:r>
           </a:p>
-          <a:p>
-            <a:endParaRPr/>
-          </a:p>
-          <a:p>
-            <a:r>
-              <a:t>```{=latex}</a:t>
-            </a:r>
-          </a:p>
-          <a:p>
-            <a:r>
-              <a:t>\end{center}</a:t>
-            </a:r>
-          </a:p>
-          <a:p>
-            <a:r>
-              <a:t>\par\vspace{1\baselineskip}</a:t>
-            </a:r>
-          </a:p>
-          <a:p>
-            <a:r>
-              <a:t>```</a:t>
+          <a:p/>
+          <a:p>
+            <a:r>
+              <a:t>:::</a:t>
+            </a:r>
+          </a:p>
+          <a:p/>
+          <a:p>
+            <a:r>
+              <a:t>{{vspace:1}}</a:t>
             </a:r>
           </a:p>
         </p:txBody>
